--- a/public/fun/pack/pptx/birthdaypro/돌잔치프리미엄_32_돌잡이중심_토프아이보리.pptx
+++ b/public/fun/pack/pptx/birthdaypro/돌잔치프리미엄_32_돌잡이중심_토프아이보리.pptx
@@ -112,12 +112,12 @@
   <p:extLst>
     <p:ext uri="{521415D9-36F7-43E2-AB2F-B90AF26B5E84}">
       <p14:sectionLst xmlns:p14="http://schemas.microsoft.com/office/powerpoint/2010/main">
-        <p14:section name="시작" id="{C0EE4C2C-C4EF-4A5E-8CF4-98FA57087C8C}">
+        <p14:section name="시작" id="{48F81B1B-8552-429D-B27D-3953D2252838}">
           <p14:sldIdLst>
             <p14:sldId id="256"/>
           </p14:sldIdLst>
         </p14:section>
-        <p14:section name="본문" id="{D9D284A0-0320-4374-9796-8CA628405119}">
+        <p14:section name="본문" id="{4B3AD675-E18A-4686-ABEB-7590D6443198}">
           <p14:sldIdLst>
             <p14:sldId id="257"/>
             <p14:sldId id="258"/>
@@ -125,7 +125,7 @@
             <p14:sldId id="260"/>
           </p14:sldIdLst>
         </p14:section>
-        <p14:section name="마무리" id="{4B646341-8999-4ADC-8A62-AD25393CA7C1}">
+        <p14:section name="마무리" id="{E0AD2613-0E5A-4897-AB21-46FC34F98F96}">
           <p14:sldIdLst>
             <p14:sldId id="261"/>
           </p14:sldIdLst>
@@ -1518,7 +1518,7 @@
             </a:lvl1pPr>
           </a:lstStyle>
           <a:p>
-            <a:fld id="{D038ACE6-5714-483F-9AD3-C32705CECFE0}" type="slidenum">
+            <a:fld id="{22023164-2BC6-4E42-8540-F3BA0B66B1C6}" type="slidenum">
               <a:rPr lang="en-US"/>
               <a:t>‹#›</a:t>
             </a:fld>
@@ -2233,7 +2233,7 @@
             </a:lvl1pPr>
           </a:lstStyle>
           <a:p>
-            <a:fld id="{A2F699FD-819E-4EEA-8171-67D8170733FB}" type="slidenum">
+            <a:fld id="{9269751C-E1EC-480D-9BF7-8A84B57EB71D}" type="slidenum">
               <a:rPr lang="en-US"/>
               <a:t>‹#›</a:t>
             </a:fld>
@@ -2911,7 +2911,7 @@
             </a:lvl1pPr>
           </a:lstStyle>
           <a:p>
-            <a:fld id="{C2D579E8-3003-4849-A60C-38AAE5A71E22}" type="slidenum">
+            <a:fld id="{2562E501-3E81-4992-BDBE-EFDD6CB2CC43}" type="slidenum">
               <a:rPr lang="en-US"/>
               <a:t>‹#›</a:t>
             </a:fld>
@@ -3796,7 +3796,7 @@
           <a:p>
             <a:r>
               <a:rPr lang="ko-KR"/>
-              <a:t>아기 이름 · 0000. 00. 00</a:t>
+              <a:t>아기 이름 · 날짜 입력</a:t>
             </a:r>
           </a:p>
           <a:p>
@@ -3957,7 +3957,7 @@
           <a:bodyPr/>
           <a:lstStyle/>
           <a:p>
-            <a:fld id="{0430A33F-104B-4738-9D51-DEA4361154F6}" type="slidenum">
+            <a:fld id="{B298EBCB-4B57-4965-BA95-D9163019B334}" type="slidenum">
               <a:rPr lang="en-US"/>
               <a:t>‹#›</a:t>
             </a:fld>
@@ -4557,7 +4557,7 @@
           <a:bodyPr/>
           <a:lstStyle/>
           <a:p>
-            <a:fld id="{533930C5-E3A8-4F7A-AB04-4B52AC330088}" type="slidenum">
+            <a:fld id="{A4B5D29F-DB3A-4966-9461-FB915161FE4B}" type="slidenum">
               <a:rPr lang="en-US"/>
               <a:t>‹#›</a:t>
             </a:fld>
@@ -5721,7 +5721,7 @@
           <a:bodyPr/>
           <a:lstStyle/>
           <a:p>
-            <a:fld id="{2FECB906-3660-42B5-8848-23695BE79FA3}" type="slidenum">
+            <a:fld id="{18A0816C-1442-41D0-83C3-42BD7B1C5DCA}" type="slidenum">
               <a:rPr lang="en-US"/>
               <a:t>‹#›</a:t>
             </a:fld>
@@ -6475,7 +6475,7 @@
           <a:bodyPr/>
           <a:lstStyle/>
           <a:p>
-            <a:fld id="{A0EE9FCE-6121-4744-B781-CCCA0E49DEF3}" type="slidenum">
+            <a:fld id="{243E1AD8-5696-4A8D-A5DB-436E326FD26D}" type="slidenum">
               <a:rPr lang="en-US"/>
               <a:t>‹#›</a:t>
             </a:fld>
